--- a/dist/초1/국어/말과글/초1_국어_말과글_02_문장부호_학생용.pptx
+++ b/dist/초1/국어/말과글/초1_국어_말과글_02_문장부호_학생용.pptx
@@ -119,19 +119,19 @@
   <p:extLst>
     <p:ext uri="{521415D9-36F7-43E2-AB2F-B90AF26B5E84}">
       <p14:sectionLst xmlns:p14="http://schemas.microsoft.com/office/powerpoint/2010/main">
-        <p14:section name="도입" id="{431a168e-cdbf-94a2-f44a-3f343137ac76}">
+        <p14:section name="도입" id="{e877b63c-36ab-1b93-fef0-ccbc3829799a}">
           <p14:sldIdLst>
             <p14:sldId id="256"/>
             <p14:sldId id="257"/>
           </p14:sldIdLst>
         </p14:section>
-        <p14:section name="개념" id="{9c9705d7-e29f-2582-fab6-105da2919057}">
+        <p14:section name="개념" id="{e90e55df-8d5b-0a30-f091-7a4396fce03e}">
           <p14:sldIdLst>
             <p14:sldId id="258"/>
             <p14:sldId id="259"/>
           </p14:sldIdLst>
         </p14:section>
-        <p14:section name="연습" id="{b181f387-51b6-c5f2-4bf5-566134758937}">
+        <p14:section name="연습" id="{ce1a7e6b-2b02-0c9c-a67f-99cc01807f81}">
           <p14:sldIdLst>
             <p14:sldId id="260"/>
             <p14:sldId id="261"/>
@@ -140,18 +140,18 @@
             <p14:sldId id="264"/>
           </p14:sldIdLst>
         </p14:section>
-        <p14:section name="확인" id="{613d02b8-0290-d99e-3903-d47d79d3657a}">
+        <p14:section name="확인" id="{80c9d2a3-edd3-bf2c-61fe-45ddfb965d58}">
           <p14:sldIdLst>
             <p14:sldId id="265"/>
             <p14:sldId id="266"/>
           </p14:sldIdLst>
         </p14:section>
-        <p14:section name="정리" id="{1e2a9367-5f64-2b8d-5c71-37730f8b5955}">
+        <p14:section name="정리" id="{8e52a007-5693-dbd4-d5e4-8cccb5c104bd}">
           <p14:sldIdLst>
             <p14:sldId id="267"/>
           </p14:sldIdLst>
         </p14:section>
-        <p14:section name="보충" id="{1624e2a3-59cc-51cb-1149-4ae0201ada17}">
+        <p14:section name="보충" id="{a667e774-34f6-d6f6-6097-ef10b682ec22}">
           <p14:sldIdLst>
             <p14:sldId id="268"/>
           </p14:sldIdLst>

--- a/dist/초1/국어/말과글/초1_국어_말과글_02_문장부호_학생용.pptx
+++ b/dist/초1/국어/말과글/초1_국어_말과글_02_문장부호_학생용.pptx
@@ -119,19 +119,19 @@
   <p:extLst>
     <p:ext uri="{521415D9-36F7-43E2-AB2F-B90AF26B5E84}">
       <p14:sectionLst xmlns:p14="http://schemas.microsoft.com/office/powerpoint/2010/main">
-        <p14:section name="도입" id="{e877b63c-36ab-1b93-fef0-ccbc3829799a}">
+        <p14:section name="도입" id="{5cf5e474-293d-f685-700d-81aa3f2a132c}">
           <p14:sldIdLst>
             <p14:sldId id="256"/>
             <p14:sldId id="257"/>
           </p14:sldIdLst>
         </p14:section>
-        <p14:section name="개념" id="{e90e55df-8d5b-0a30-f091-7a4396fce03e}">
+        <p14:section name="개념" id="{d7e7733f-c9e8-c22f-4761-0eba6d0e29d3}">
           <p14:sldIdLst>
             <p14:sldId id="258"/>
             <p14:sldId id="259"/>
           </p14:sldIdLst>
         </p14:section>
-        <p14:section name="연습" id="{ce1a7e6b-2b02-0c9c-a67f-99cc01807f81}">
+        <p14:section name="연습" id="{41355b75-2684-e889-00cd-d085915d2fd6}">
           <p14:sldIdLst>
             <p14:sldId id="260"/>
             <p14:sldId id="261"/>
@@ -140,18 +140,18 @@
             <p14:sldId id="264"/>
           </p14:sldIdLst>
         </p14:section>
-        <p14:section name="확인" id="{80c9d2a3-edd3-bf2c-61fe-45ddfb965d58}">
+        <p14:section name="확인" id="{36d7c751-fcaf-cc25-79e0-1489b15358b5}">
           <p14:sldIdLst>
             <p14:sldId id="265"/>
             <p14:sldId id="266"/>
           </p14:sldIdLst>
         </p14:section>
-        <p14:section name="정리" id="{8e52a007-5693-dbd4-d5e4-8cccb5c104bd}">
+        <p14:section name="정리" id="{71feaf2c-495b-f280-a9ed-2d866b4976f7}">
           <p14:sldIdLst>
             <p14:sldId id="267"/>
           </p14:sldIdLst>
         </p14:section>
-        <p14:section name="보충" id="{a667e774-34f6-d6f6-6097-ef10b682ec22}">
+        <p14:section name="보충" id="{476ef856-b123-9b76-3f51-a0cff1b7cc5e}">
           <p14:sldIdLst>
             <p14:sldId id="268"/>
           </p14:sldIdLst>
